--- a/04. Programming in java/Practical/Java Lab - 01.pptx
+++ b/04. Programming in java/Practical/Java Lab - 01.pptx
@@ -8954,357 +8954,36 @@
           <a:chExt cx="0" cy="0"/>
         </a:xfrm>
       </p:grpSpPr>
-      <p:sp>
-        <p:nvSpPr>
-          <p:cNvPr id="2" name="Thanks"/>
-          <p:cNvSpPr txBox="1"/>
-          <p:nvPr/>
-        </p:nvSpPr>
-        <p:spPr>
-          <a:xfrm>
-            <a:off x="548640" y="1186746"/>
-            <a:ext cx="7315200" cy="564428"/>
-          </a:xfrm>
-          <a:prstGeom prst="rect">
-            <a:avLst/>
-          </a:prstGeom>
-          <a:noFill/>
-          <a:ln/>
-        </p:spPr>
-        <p:txBody>
-          <a:bodyPr wrap="square" lIns="0" tIns="0" rIns="0" bIns="0" rtlCol="0" anchor="t"/>
-          <a:lstStyle/>
-          <a:p>
-            <a:pPr marL="0" indent="0">
-              <a:buNone/>
-            </a:pPr>
-            <a:r>
-              <a:rPr lang="en-US" sz="4800" b="1" dirty="0">
-                <a:solidFill>
-                  <a:schemeClr val="bg1"/>
-                </a:solidFill>
-                <a:latin typeface="Hind Siliguri" panose="02000000000000000000" pitchFamily="2" charset="0"/>
-                <a:cs typeface="Hind Siliguri" panose="02000000000000000000" pitchFamily="2" charset="0"/>
-              </a:rPr>
-              <a:t>ধন্যবাদ!</a:t>
-            </a:r>
-            <a:endParaRPr lang="en-US" sz="4800" dirty="0">
-              <a:latin typeface="Hind Siliguri" panose="02000000000000000000" pitchFamily="2" charset="0"/>
-              <a:cs typeface="Hind Siliguri" panose="02000000000000000000" pitchFamily="2" charset="0"/>
-            </a:endParaRPr>
-          </a:p>
-        </p:txBody>
-      </p:sp>
-      <p:sp>
-        <p:nvSpPr>
-          <p:cNvPr id="4" name="Info card"/>
-          <p:cNvSpPr/>
-          <p:nvPr/>
-        </p:nvSpPr>
-        <p:spPr>
-          <a:xfrm>
-            <a:off x="548640" y="2289289"/>
-            <a:ext cx="5669280" cy="2008391"/>
-          </a:xfrm>
-          <a:prstGeom prst="roundRect">
-            <a:avLst>
-              <a:gd name="adj" fmla="val 6667"/>
-            </a:avLst>
-          </a:prstGeom>
-          <a:solidFill>
-            <a:schemeClr val="tx1"/>
-          </a:solidFill>
-          <a:ln/>
-        </p:spPr>
-      </p:sp>
-      <p:grpSp>
-        <p:nvGrpSpPr>
-          <p:cNvPr id="10" name="Group 9">
+      <p:pic>
+        <p:nvPicPr>
+          <p:cNvPr id="14" name="Picture 13">
             <a:extLst>
               <a:ext uri="{FF2B5EF4-FFF2-40B4-BE49-F238E27FC236}">
-                <a16:creationId xmlns:a16="http://schemas.microsoft.com/office/drawing/2014/main" id="{45B3FE14-8100-0A95-D686-F16CC98EBC49}"/>
+                <a16:creationId xmlns:a16="http://schemas.microsoft.com/office/drawing/2014/main" id="{9C5484C0-EBC7-90C1-A328-9A5E6EDC161E}"/>
               </a:ext>
             </a:extLst>
           </p:cNvPr>
-          <p:cNvGrpSpPr/>
-          <p:nvPr/>
-        </p:nvGrpSpPr>
-        <p:grpSpPr>
-          <a:xfrm>
-            <a:off x="822960" y="2468880"/>
-            <a:ext cx="5212080" cy="1551848"/>
-            <a:chOff x="822960" y="2468880"/>
-            <a:chExt cx="5212080" cy="1551848"/>
-          </a:xfrm>
-        </p:grpSpPr>
-        <p:sp>
-          <p:nvSpPr>
-            <p:cNvPr id="5" name="Info name"/>
-            <p:cNvSpPr txBox="1"/>
-            <p:nvPr/>
-          </p:nvSpPr>
-          <p:spPr>
-            <a:xfrm>
-              <a:off x="822960" y="2468880"/>
-              <a:ext cx="5212080" cy="274320"/>
-            </a:xfrm>
-            <a:prstGeom prst="rect">
-              <a:avLst/>
-            </a:prstGeom>
-            <a:noFill/>
-            <a:ln/>
-          </p:spPr>
-          <p:txBody>
-            <a:bodyPr wrap="square" lIns="0" tIns="0" rIns="0" bIns="0" rtlCol="0" anchor="t"/>
-            <a:lstStyle/>
-            <a:p>
-              <a:pPr marL="0" indent="0">
-                <a:buNone/>
-              </a:pPr>
-              <a:r>
-                <a:rPr lang="en-US" sz="2400" b="1" dirty="0">
-                  <a:solidFill>
-                    <a:schemeClr val="bg1"/>
-                  </a:solidFill>
-                  <a:latin typeface="Hind Siliguri" panose="02000000000000000000" pitchFamily="2" charset="0"/>
-                  <a:cs typeface="Hind Siliguri" panose="02000000000000000000" pitchFamily="2" charset="0"/>
-                </a:rPr>
-                <a:t>মোঃ রুহুল আমিন</a:t>
-              </a:r>
-              <a:endParaRPr lang="en-US" sz="2400" dirty="0">
-                <a:latin typeface="Hind Siliguri" panose="02000000000000000000" pitchFamily="2" charset="0"/>
-                <a:cs typeface="Hind Siliguri" panose="02000000000000000000" pitchFamily="2" charset="0"/>
-              </a:endParaRPr>
-            </a:p>
-          </p:txBody>
-        </p:sp>
-        <p:sp>
-          <p:nvSpPr>
-            <p:cNvPr id="6" name="Info designation"/>
-            <p:cNvSpPr txBox="1"/>
-            <p:nvPr/>
-          </p:nvSpPr>
-          <p:spPr>
-            <a:xfrm>
-              <a:off x="822960" y="2879702"/>
-              <a:ext cx="5212080" cy="182880"/>
-            </a:xfrm>
-            <a:prstGeom prst="rect">
-              <a:avLst/>
-            </a:prstGeom>
-            <a:noFill/>
-            <a:ln/>
-          </p:spPr>
-          <p:txBody>
-            <a:bodyPr wrap="square" lIns="0" tIns="0" rIns="0" bIns="0" rtlCol="0" anchor="t"/>
-            <a:lstStyle/>
-            <a:p>
-              <a:pPr marL="0" indent="0">
-                <a:buNone/>
-              </a:pPr>
-              <a:r>
-                <a:rPr lang="en-US" sz="1600" dirty="0">
-                  <a:solidFill>
-                    <a:schemeClr val="bg1"/>
-                  </a:solidFill>
-                  <a:latin typeface="Hind Siliguri" panose="02000000000000000000" pitchFamily="2" charset="0"/>
-                  <a:cs typeface="Hind Siliguri" panose="02000000000000000000" pitchFamily="2" charset="0"/>
-                </a:rPr>
-                <a:t>জুনিয়র ইন্সট্রাক্টর (টেক / কম্পিউটার)</a:t>
-              </a:r>
-              <a:endParaRPr lang="en-US" sz="1600" dirty="0">
-                <a:latin typeface="Hind Siliguri" panose="02000000000000000000" pitchFamily="2" charset="0"/>
-                <a:cs typeface="Hind Siliguri" panose="02000000000000000000" pitchFamily="2" charset="0"/>
-              </a:endParaRPr>
-            </a:p>
-          </p:txBody>
-        </p:sp>
-        <p:sp>
-          <p:nvSpPr>
-            <p:cNvPr id="7" name="Info institute"/>
-            <p:cNvSpPr txBox="1"/>
-            <p:nvPr/>
-          </p:nvSpPr>
-          <p:spPr>
-            <a:xfrm>
-              <a:off x="822960" y="3199084"/>
-              <a:ext cx="5212080" cy="182880"/>
-            </a:xfrm>
-            <a:prstGeom prst="rect">
-              <a:avLst/>
-            </a:prstGeom>
-            <a:noFill/>
-            <a:ln/>
-          </p:spPr>
-          <p:txBody>
-            <a:bodyPr wrap="square" lIns="0" tIns="0" rIns="0" bIns="0" rtlCol="0" anchor="t"/>
-            <a:lstStyle/>
-            <a:p>
-              <a:pPr marL="0" indent="0">
-                <a:buNone/>
-              </a:pPr>
-              <a:r>
-                <a:rPr lang="en-US" sz="1600" dirty="0">
-                  <a:solidFill>
-                    <a:schemeClr val="bg1"/>
-                  </a:solidFill>
-                  <a:latin typeface="Hind Siliguri" panose="02000000000000000000" pitchFamily="2" charset="0"/>
-                  <a:cs typeface="Hind Siliguri" panose="02000000000000000000" pitchFamily="2" charset="0"/>
-                </a:rPr>
-                <a:t>কুষ্টিয়া সরকারী পলিটেকনিক ইনস্টিটিউট, কুষ্টিয়া।</a:t>
-              </a:r>
-              <a:endParaRPr lang="en-US" sz="1600" dirty="0">
-                <a:latin typeface="Hind Siliguri" panose="02000000000000000000" pitchFamily="2" charset="0"/>
-                <a:cs typeface="Hind Siliguri" panose="02000000000000000000" pitchFamily="2" charset="0"/>
-              </a:endParaRPr>
-            </a:p>
-          </p:txBody>
-        </p:sp>
-        <p:sp>
-          <p:nvSpPr>
-            <p:cNvPr id="8" name="Info institute">
-              <a:extLst>
-                <a:ext uri="{FF2B5EF4-FFF2-40B4-BE49-F238E27FC236}">
-                  <a16:creationId xmlns:a16="http://schemas.microsoft.com/office/drawing/2014/main" id="{6F284F27-B9E0-09A3-6E54-7E9BA5299E5E}"/>
-                </a:ext>
-              </a:extLst>
-            </p:cNvPr>
-            <p:cNvSpPr txBox="1"/>
-            <p:nvPr/>
-          </p:nvSpPr>
-          <p:spPr>
-            <a:xfrm>
-              <a:off x="822960" y="3518466"/>
-              <a:ext cx="5212080" cy="182880"/>
-            </a:xfrm>
-            <a:prstGeom prst="rect">
-              <a:avLst/>
-            </a:prstGeom>
-            <a:noFill/>
-            <a:ln/>
-          </p:spPr>
-          <p:txBody>
-            <a:bodyPr wrap="square" lIns="0" tIns="0" rIns="0" bIns="0" rtlCol="0" anchor="t"/>
-            <a:lstStyle/>
-            <a:p>
-              <a:pPr marL="0" indent="0">
-                <a:buNone/>
-              </a:pPr>
-              <a:r>
-                <a:rPr lang="en-US" sz="1600" dirty="0" err="1">
-                  <a:solidFill>
-                    <a:schemeClr val="bg1"/>
-                  </a:solidFill>
-                  <a:latin typeface="Hind Siliguri" panose="02000000000000000000" pitchFamily="2" charset="0"/>
-                  <a:cs typeface="Hind Siliguri" panose="02000000000000000000" pitchFamily="2" charset="0"/>
-                </a:rPr>
-                <a:t>মোবাইল</a:t>
-              </a:r>
-              <a:r>
-                <a:rPr lang="en-US" sz="1600" dirty="0">
-                  <a:solidFill>
-                    <a:schemeClr val="bg1"/>
-                  </a:solidFill>
-                  <a:latin typeface="Hind Siliguri" panose="02000000000000000000" pitchFamily="2" charset="0"/>
-                  <a:cs typeface="Hind Siliguri" panose="02000000000000000000" pitchFamily="2" charset="0"/>
-                </a:rPr>
-                <a:t> </a:t>
-              </a:r>
-              <a:r>
-                <a:rPr lang="en-US" sz="1600" dirty="0" err="1">
-                  <a:solidFill>
-                    <a:schemeClr val="bg1"/>
-                  </a:solidFill>
-                  <a:latin typeface="Hind Siliguri" panose="02000000000000000000" pitchFamily="2" charset="0"/>
-                  <a:cs typeface="Hind Siliguri" panose="02000000000000000000" pitchFamily="2" charset="0"/>
-                </a:rPr>
-                <a:t>নংঃ</a:t>
-              </a:r>
-              <a:r>
-                <a:rPr lang="en-US" sz="1600" dirty="0">
-                  <a:solidFill>
-                    <a:schemeClr val="bg1"/>
-                  </a:solidFill>
-                  <a:latin typeface="Hind Siliguri" panose="02000000000000000000" pitchFamily="2" charset="0"/>
-                  <a:cs typeface="Hind Siliguri" panose="02000000000000000000" pitchFamily="2" charset="0"/>
-                </a:rPr>
-                <a:t> ০১৮২৩২০৮৫৩৩</a:t>
-              </a:r>
-              <a:endParaRPr lang="en-US" sz="1600" dirty="0">
-                <a:latin typeface="Hind Siliguri" panose="02000000000000000000" pitchFamily="2" charset="0"/>
-                <a:cs typeface="Hind Siliguri" panose="02000000000000000000" pitchFamily="2" charset="0"/>
-              </a:endParaRPr>
-            </a:p>
-          </p:txBody>
-        </p:sp>
-        <p:sp>
-          <p:nvSpPr>
-            <p:cNvPr id="9" name="Info institute">
-              <a:extLst>
-                <a:ext uri="{FF2B5EF4-FFF2-40B4-BE49-F238E27FC236}">
-                  <a16:creationId xmlns:a16="http://schemas.microsoft.com/office/drawing/2014/main" id="{A16120F7-0E8F-FCDF-6F81-176B0F5D7992}"/>
-                </a:ext>
-              </a:extLst>
-            </p:cNvPr>
-            <p:cNvSpPr txBox="1"/>
-            <p:nvPr/>
-          </p:nvSpPr>
-          <p:spPr>
-            <a:xfrm>
-              <a:off x="822960" y="3837848"/>
-              <a:ext cx="5212080" cy="182880"/>
-            </a:xfrm>
-            <a:prstGeom prst="rect">
-              <a:avLst/>
-            </a:prstGeom>
-            <a:noFill/>
-            <a:ln/>
-          </p:spPr>
-          <p:txBody>
-            <a:bodyPr wrap="square" lIns="0" tIns="0" rIns="0" bIns="0" rtlCol="0" anchor="t"/>
-            <a:lstStyle/>
-            <a:p>
-              <a:pPr marL="0" indent="0">
-                <a:buNone/>
-              </a:pPr>
-              <a:r>
-                <a:rPr lang="en-US" sz="1600" dirty="0">
-                  <a:solidFill>
-                    <a:schemeClr val="bg1"/>
-                  </a:solidFill>
-                  <a:latin typeface="Hind Siliguri" panose="02000000000000000000" pitchFamily="2" charset="0"/>
-                  <a:cs typeface="Hind Siliguri" panose="02000000000000000000" pitchFamily="2" charset="0"/>
-                </a:rPr>
-                <a:t>ই-</a:t>
-              </a:r>
-              <a:r>
-                <a:rPr lang="en-US" sz="1600" dirty="0" err="1">
-                  <a:solidFill>
-                    <a:schemeClr val="bg1"/>
-                  </a:solidFill>
-                  <a:latin typeface="Hind Siliguri" panose="02000000000000000000" pitchFamily="2" charset="0"/>
-                  <a:cs typeface="Hind Siliguri" panose="02000000000000000000" pitchFamily="2" charset="0"/>
-                </a:rPr>
-                <a:t>মেইলঃ</a:t>
-              </a:r>
-              <a:r>
-                <a:rPr lang="en-US" sz="1600" dirty="0">
-                  <a:solidFill>
-                    <a:schemeClr val="bg1"/>
-                  </a:solidFill>
-                  <a:latin typeface="Hind Siliguri" panose="02000000000000000000" pitchFamily="2" charset="0"/>
-                  <a:cs typeface="Hind Siliguri" panose="02000000000000000000" pitchFamily="2" charset="0"/>
-                </a:rPr>
-                <a:t> ruhul.computer12@gmail.com</a:t>
-              </a:r>
-              <a:endParaRPr lang="en-US" sz="1600" dirty="0">
-                <a:latin typeface="Hind Siliguri" panose="02000000000000000000" pitchFamily="2" charset="0"/>
-                <a:cs typeface="Hind Siliguri" panose="02000000000000000000" pitchFamily="2" charset="0"/>
-              </a:endParaRPr>
-            </a:p>
-          </p:txBody>
-        </p:sp>
-      </p:grpSp>
+          <p:cNvPicPr>
+            <a:picLocks noChangeAspect="1"/>
+          </p:cNvPicPr>
+          <p:nvPr/>
+        </p:nvPicPr>
+        <p:blipFill>
+          <a:blip r:embed="rId3"/>
+          <a:stretch>
+            <a:fillRect/>
+          </a:stretch>
+        </p:blipFill>
+        <p:spPr>
+          <a:xfrm>
+            <a:off x="2429" y="0"/>
+            <a:ext cx="9139141" cy="5143500"/>
+          </a:xfrm>
+          <a:prstGeom prst="rect">
+            <a:avLst/>
+          </a:prstGeom>
+        </p:spPr>
+      </p:pic>
     </p:spTree>
   </p:cSld>
   <p:clrMapOvr>
